--- a/ゲーム科1年/00_前期/プログラミングⅠ/12_繰り返し文(while).pptx
+++ b/ゲーム科1年/00_前期/プログラミングⅠ/12_繰り返し文(while).pptx
@@ -261,7 +261,7 @@
           <a:p>
             <a:fld id="{E9CC885B-4903-4D54-9A93-00025F12DED9}" type="datetimeFigureOut">
               <a:rPr kumimoji="1" lang="ja-JP" altLang="en-US" smtClean="0"/>
-              <a:t>2024/11/14</a:t>
+              <a:t>2025/2/28</a:t>
             </a:fld>
             <a:endParaRPr kumimoji="1" lang="ja-JP" altLang="en-US"/>
           </a:p>
@@ -491,7 +491,7 @@
           <a:p>
             <a:fld id="{E9CC885B-4903-4D54-9A93-00025F12DED9}" type="datetimeFigureOut">
               <a:rPr kumimoji="1" lang="ja-JP" altLang="en-US" smtClean="0"/>
-              <a:t>2024/11/14</a:t>
+              <a:t>2025/2/28</a:t>
             </a:fld>
             <a:endParaRPr kumimoji="1" lang="ja-JP" altLang="en-US"/>
           </a:p>
@@ -731,7 +731,7 @@
           <a:p>
             <a:fld id="{E9CC885B-4903-4D54-9A93-00025F12DED9}" type="datetimeFigureOut">
               <a:rPr kumimoji="1" lang="ja-JP" altLang="en-US" smtClean="0"/>
-              <a:t>2024/11/14</a:t>
+              <a:t>2025/2/28</a:t>
             </a:fld>
             <a:endParaRPr kumimoji="1" lang="ja-JP" altLang="en-US"/>
           </a:p>
@@ -961,7 +961,7 @@
           <a:p>
             <a:fld id="{E9CC885B-4903-4D54-9A93-00025F12DED9}" type="datetimeFigureOut">
               <a:rPr kumimoji="1" lang="ja-JP" altLang="en-US" smtClean="0"/>
-              <a:t>2024/11/14</a:t>
+              <a:t>2025/2/28</a:t>
             </a:fld>
             <a:endParaRPr kumimoji="1" lang="ja-JP" altLang="en-US"/>
           </a:p>
@@ -1236,7 +1236,7 @@
           <a:p>
             <a:fld id="{E9CC885B-4903-4D54-9A93-00025F12DED9}" type="datetimeFigureOut">
               <a:rPr kumimoji="1" lang="ja-JP" altLang="en-US" smtClean="0"/>
-              <a:t>2024/11/14</a:t>
+              <a:t>2025/2/28</a:t>
             </a:fld>
             <a:endParaRPr kumimoji="1" lang="ja-JP" altLang="en-US"/>
           </a:p>
@@ -1565,7 +1565,7 @@
           <a:p>
             <a:fld id="{E9CC885B-4903-4D54-9A93-00025F12DED9}" type="datetimeFigureOut">
               <a:rPr kumimoji="1" lang="ja-JP" altLang="en-US" smtClean="0"/>
-              <a:t>2024/11/14</a:t>
+              <a:t>2025/2/28</a:t>
             </a:fld>
             <a:endParaRPr kumimoji="1" lang="ja-JP" altLang="en-US"/>
           </a:p>
@@ -2041,7 +2041,7 @@
           <a:p>
             <a:fld id="{E9CC885B-4903-4D54-9A93-00025F12DED9}" type="datetimeFigureOut">
               <a:rPr kumimoji="1" lang="ja-JP" altLang="en-US" smtClean="0"/>
-              <a:t>2024/11/14</a:t>
+              <a:t>2025/2/28</a:t>
             </a:fld>
             <a:endParaRPr kumimoji="1" lang="ja-JP" altLang="en-US"/>
           </a:p>
@@ -2182,7 +2182,7 @@
           <a:p>
             <a:fld id="{E9CC885B-4903-4D54-9A93-00025F12DED9}" type="datetimeFigureOut">
               <a:rPr kumimoji="1" lang="ja-JP" altLang="en-US" smtClean="0"/>
-              <a:t>2024/11/14</a:t>
+              <a:t>2025/2/28</a:t>
             </a:fld>
             <a:endParaRPr kumimoji="1" lang="ja-JP" altLang="en-US"/>
           </a:p>
@@ -2295,7 +2295,7 @@
           <a:p>
             <a:fld id="{E9CC885B-4903-4D54-9A93-00025F12DED9}" type="datetimeFigureOut">
               <a:rPr kumimoji="1" lang="ja-JP" altLang="en-US" smtClean="0"/>
-              <a:t>2024/11/14</a:t>
+              <a:t>2025/2/28</a:t>
             </a:fld>
             <a:endParaRPr kumimoji="1" lang="ja-JP" altLang="en-US"/>
           </a:p>
@@ -2638,7 +2638,7 @@
           <a:p>
             <a:fld id="{E9CC885B-4903-4D54-9A93-00025F12DED9}" type="datetimeFigureOut">
               <a:rPr kumimoji="1" lang="ja-JP" altLang="en-US" smtClean="0"/>
-              <a:t>2024/11/14</a:t>
+              <a:t>2025/2/28</a:t>
             </a:fld>
             <a:endParaRPr kumimoji="1" lang="ja-JP" altLang="en-US"/>
           </a:p>
@@ -2926,7 +2926,7 @@
           <a:p>
             <a:fld id="{E9CC885B-4903-4D54-9A93-00025F12DED9}" type="datetimeFigureOut">
               <a:rPr kumimoji="1" lang="ja-JP" altLang="en-US" smtClean="0"/>
-              <a:t>2024/11/14</a:t>
+              <a:t>2025/2/28</a:t>
             </a:fld>
             <a:endParaRPr kumimoji="1" lang="ja-JP" altLang="en-US"/>
           </a:p>
@@ -3199,7 +3199,7 @@
           <a:p>
             <a:fld id="{E9CC885B-4903-4D54-9A93-00025F12DED9}" type="datetimeFigureOut">
               <a:rPr kumimoji="1" lang="ja-JP" altLang="en-US" smtClean="0"/>
-              <a:t>2024/11/14</a:t>
+              <a:t>2025/2/28</a:t>
             </a:fld>
             <a:endParaRPr kumimoji="1" lang="ja-JP" altLang="en-US"/>
           </a:p>
